--- a/examples/ppt/charts/charts-bubble.pptx
+++ b/examples/ppt/charts/charts-bubble.pptx
@@ -5,14 +5,14 @@
     <p:sldMasterId xmlns:r="http://schemas.openxmlformats.org/officeDocument/2006/relationships" id="2147483648" r:id="rId1"/>
   </p:sldMasterIdLst>
   <p:sldIdLst>
-    <p:sldId id="256" r:id="R22e43be3f47a481f"/>
-    <p:sldId id="257" r:id="R7b782f99205c470a"/>
-    <p:sldId id="258" r:id="R1ccdfa40dcbe4503"/>
-    <p:sldId id="259" r:id="Rf06a6a0af966488a"/>
-    <p:sldId id="260" r:id="R4d98f6ff46fe478d"/>
-    <p:sldId id="261" r:id="Rfad6036c673e4cb0"/>
-    <p:sldId id="262" r:id="Rded0d6ef086041aa"/>
-    <p:sldId id="263" r:id="Rd0fbb04cd5fa49af"/>
+    <p:sldId id="256" r:id="R85ce3ffcca9c4334"/>
+    <p:sldId id="257" r:id="R0d29f6567c504ff8"/>
+    <p:sldId id="258" r:id="Rd1be691a709a4920"/>
+    <p:sldId id="259" r:id="R9f13d9ff6c23438f"/>
+    <p:sldId id="260" r:id="R40d80650ddb0436c"/>
+    <p:sldId id="261" r:id="Rb4b6a98347294043"/>
+    <p:sldId id="262" r:id="R612a652b9b2a4a9d"/>
+    <p:sldId id="263" r:id="Ra83f17a971cc4bb1"/>
   </p:sldIdLst>
   <p:sldSz cx="12192000" cy="6858000"/>
   <p:notesSz cx="6858000" cy="9144000"/>
@@ -287,7 +287,7 @@
 </file>
 
 <file path=ppt/slideMasters/slideMaster1.xml><?xml version="1.0" encoding="utf-8"?>
-<p:sldMaster xmlns:p="http://schemas.openxmlformats.org/presentationml/2006/main">
+<p:sldMaster xmlns:r="http://schemas.openxmlformats.org/officeDocument/2006/relationships" xmlns:p="http://schemas.openxmlformats.org/presentationml/2006/main">
   <p:cSld>
     <p:spTree>
       <p:nvGrpSpPr>
@@ -2155,10 +2155,12 @@
             <a:lstStyle xmlns:a="http://schemas.openxmlformats.org/drawingml/2006/main"/>
             <a:p xmlns:a="http://schemas.openxmlformats.org/drawingml/2006/main">
               <a:pPr>
-                <a:defRPr sz="900" b="0">
+                <a:defRPr sz="900">
                   <a:solidFill>
                     <a:srgbClr val="333333"/>
                   </a:solidFill>
+                  <a:latin typeface="Calibri"/>
+                  <a:ea typeface="Calibri"/>
                 </a:defRPr>
               </a:pPr>
             </a:p>
@@ -7071,8 +7073,8 @@
       <p:grpSpPr/>
       <p:sp>
         <p:nvSpPr>
-          <p:cNvPr id="10000" name="TextBox 1"/>
-          <p:cNvSpPr/>
+          <p:cNvPr id="100000" name="TextBox 1"/>
+          <p:cNvSpPr txBox="1"/>
           <p:nvPr/>
         </p:nvSpPr>
         <p:spPr>
@@ -7099,7 +7101,7 @@
       </p:sp>
       <p:graphicFrame>
         <p:nvGraphicFramePr>
-          <p:cNvPr id="10001" name="bubbleScale=50"/>
+          <p:cNvPr id="100001" name="bubbleScale=50"/>
           <p:cNvGraphicFramePr/>
           <p:nvPr/>
         </p:nvGraphicFramePr>
@@ -7109,13 +7111,13 @@
         </p:xfrm>
         <a:graphic xmlns:a="http://schemas.openxmlformats.org/drawingml/2006/main">
           <a:graphicData uri="http://schemas.openxmlformats.org/drawingml/2006/chart">
-            <c:chart xmlns:r="http://schemas.openxmlformats.org/officeDocument/2006/relationships" xmlns:c="http://schemas.openxmlformats.org/drawingml/2006/chart" r:id="Rb95c6e1179f84c0b"/>
+            <c:chart xmlns:r="http://schemas.openxmlformats.org/officeDocument/2006/relationships" xmlns:c="http://schemas.openxmlformats.org/drawingml/2006/chart" r:id="R0619d486a4fd452f"/>
           </a:graphicData>
         </a:graphic>
       </p:graphicFrame>
       <p:graphicFrame>
         <p:nvGraphicFramePr>
-          <p:cNvPr id="10002" name="bubbleScale=100"/>
+          <p:cNvPr id="100002" name="bubbleScale=100"/>
           <p:cNvGraphicFramePr/>
           <p:nvPr/>
         </p:nvGraphicFramePr>
@@ -7125,13 +7127,13 @@
         </p:xfrm>
         <a:graphic xmlns:a="http://schemas.openxmlformats.org/drawingml/2006/main">
           <a:graphicData uri="http://schemas.openxmlformats.org/drawingml/2006/chart">
-            <c:chart xmlns:r="http://schemas.openxmlformats.org/officeDocument/2006/relationships" xmlns:c="http://schemas.openxmlformats.org/drawingml/2006/chart" r:id="R7fa054f5aa874981"/>
+            <c:chart xmlns:r="http://schemas.openxmlformats.org/officeDocument/2006/relationships" xmlns:c="http://schemas.openxmlformats.org/drawingml/2006/chart" r:id="Rd5d5caf18d314ee9"/>
           </a:graphicData>
         </a:graphic>
       </p:graphicFrame>
       <p:graphicFrame>
         <p:nvGraphicFramePr>
-          <p:cNvPr id="10003" name="bubbleScale=150"/>
+          <p:cNvPr id="100003" name="bubbleScale=150"/>
           <p:cNvGraphicFramePr/>
           <p:nvPr/>
         </p:nvGraphicFramePr>
@@ -7141,13 +7143,13 @@
         </p:xfrm>
         <a:graphic xmlns:a="http://schemas.openxmlformats.org/drawingml/2006/main">
           <a:graphicData uri="http://schemas.openxmlformats.org/drawingml/2006/chart">
-            <c:chart xmlns:r="http://schemas.openxmlformats.org/officeDocument/2006/relationships" xmlns:c="http://schemas.openxmlformats.org/drawingml/2006/chart" r:id="R8521e85d7fb740a0"/>
+            <c:chart xmlns:r="http://schemas.openxmlformats.org/officeDocument/2006/relationships" xmlns:c="http://schemas.openxmlformats.org/drawingml/2006/chart" r:id="Rf44d069eb62a4263"/>
           </a:graphicData>
         </a:graphic>
       </p:graphicFrame>
       <p:graphicFrame>
         <p:nvGraphicFramePr>
-          <p:cNvPr id="10004" name="bubbleScale=200"/>
+          <p:cNvPr id="100004" name="bubbleScale=200"/>
           <p:cNvGraphicFramePr/>
           <p:nvPr/>
         </p:nvGraphicFramePr>
@@ -7157,7 +7159,7 @@
         </p:xfrm>
         <a:graphic xmlns:a="http://schemas.openxmlformats.org/drawingml/2006/main">
           <a:graphicData uri="http://schemas.openxmlformats.org/drawingml/2006/chart">
-            <c:chart xmlns:r="http://schemas.openxmlformats.org/officeDocument/2006/relationships" xmlns:c="http://schemas.openxmlformats.org/drawingml/2006/chart" r:id="Rd8cce933bc6b48d1"/>
+            <c:chart xmlns:r="http://schemas.openxmlformats.org/officeDocument/2006/relationships" xmlns:c="http://schemas.openxmlformats.org/drawingml/2006/chart" r:id="R2d96d003cb0a4db9"/>
           </a:graphicData>
         </a:graphic>
       </p:graphicFrame>
@@ -7178,8 +7180,8 @@
       <p:grpSpPr/>
       <p:sp>
         <p:nvSpPr>
-          <p:cNvPr id="10005" name="TextBox 1"/>
-          <p:cNvSpPr/>
+          <p:cNvPr id="100005" name="TextBox 1"/>
+          <p:cNvSpPr txBox="1"/>
           <p:nvPr/>
         </p:nvSpPr>
         <p:spPr>
@@ -7206,7 +7208,7 @@
       </p:sp>
       <p:graphicFrame>
         <p:nvGraphicFramePr>
-          <p:cNvPr id="10006" name="sizerepresents=area"/>
+          <p:cNvPr id="100006" name="sizerepresents=area"/>
           <p:cNvGraphicFramePr/>
           <p:nvPr/>
         </p:nvGraphicFramePr>
@@ -7216,13 +7218,13 @@
         </p:xfrm>
         <a:graphic xmlns:a="http://schemas.openxmlformats.org/drawingml/2006/main">
           <a:graphicData uri="http://schemas.openxmlformats.org/drawingml/2006/chart">
-            <c:chart xmlns:r="http://schemas.openxmlformats.org/officeDocument/2006/relationships" xmlns:c="http://schemas.openxmlformats.org/drawingml/2006/chart" r:id="R638c8a0207024627"/>
+            <c:chart xmlns:r="http://schemas.openxmlformats.org/officeDocument/2006/relationships" xmlns:c="http://schemas.openxmlformats.org/drawingml/2006/chart" r:id="R7bb33c54540c496a"/>
           </a:graphicData>
         </a:graphic>
       </p:graphicFrame>
       <p:graphicFrame>
         <p:nvGraphicFramePr>
-          <p:cNvPr id="10007" name="sizerepresents=width"/>
+          <p:cNvPr id="100007" name="sizerepresents=width"/>
           <p:cNvGraphicFramePr/>
           <p:nvPr/>
         </p:nvGraphicFramePr>
@@ -7232,13 +7234,13 @@
         </p:xfrm>
         <a:graphic xmlns:a="http://schemas.openxmlformats.org/drawingml/2006/main">
           <a:graphicData uri="http://schemas.openxmlformats.org/drawingml/2006/chart">
-            <c:chart xmlns:r="http://schemas.openxmlformats.org/officeDocument/2006/relationships" xmlns:c="http://schemas.openxmlformats.org/drawingml/2006/chart" r:id="R4d5fdcec5f53487a"/>
+            <c:chart xmlns:r="http://schemas.openxmlformats.org/officeDocument/2006/relationships" xmlns:c="http://schemas.openxmlformats.org/drawingml/2006/chart" r:id="Rb8ccaecd4ffd4318"/>
           </a:graphicData>
         </a:graphic>
       </p:graphicFrame>
       <p:graphicFrame>
         <p:nvGraphicFramePr>
-          <p:cNvPr id="10008" name="area + 2 series"/>
+          <p:cNvPr id="100008" name="area + 2 series"/>
           <p:cNvGraphicFramePr/>
           <p:nvPr/>
         </p:nvGraphicFramePr>
@@ -7248,13 +7250,13 @@
         </p:xfrm>
         <a:graphic xmlns:a="http://schemas.openxmlformats.org/drawingml/2006/main">
           <a:graphicData uri="http://schemas.openxmlformats.org/drawingml/2006/chart">
-            <c:chart xmlns:r="http://schemas.openxmlformats.org/officeDocument/2006/relationships" xmlns:c="http://schemas.openxmlformats.org/drawingml/2006/chart" r:id="R9b373e3a92eb4ec2"/>
+            <c:chart xmlns:r="http://schemas.openxmlformats.org/officeDocument/2006/relationships" xmlns:c="http://schemas.openxmlformats.org/drawingml/2006/chart" r:id="Rb1bae689f65546cc"/>
           </a:graphicData>
         </a:graphic>
       </p:graphicFrame>
       <p:graphicFrame>
         <p:nvGraphicFramePr>
-          <p:cNvPr id="10009" name="width + 2 series"/>
+          <p:cNvPr id="100009" name="width + 2 series"/>
           <p:cNvGraphicFramePr/>
           <p:nvPr/>
         </p:nvGraphicFramePr>
@@ -7264,7 +7266,7 @@
         </p:xfrm>
         <a:graphic xmlns:a="http://schemas.openxmlformats.org/drawingml/2006/main">
           <a:graphicData uri="http://schemas.openxmlformats.org/drawingml/2006/chart">
-            <c:chart xmlns:r="http://schemas.openxmlformats.org/officeDocument/2006/relationships" xmlns:c="http://schemas.openxmlformats.org/drawingml/2006/chart" r:id="Rdcc638fc3f4e4d8e"/>
+            <c:chart xmlns:r="http://schemas.openxmlformats.org/officeDocument/2006/relationships" xmlns:c="http://schemas.openxmlformats.org/drawingml/2006/chart" r:id="R9d9fa0615ced401f"/>
           </a:graphicData>
         </a:graphic>
       </p:graphicFrame>
@@ -7285,8 +7287,8 @@
       <p:grpSpPr/>
       <p:sp>
         <p:nvSpPr>
-          <p:cNvPr id="10010" name="TextBox 1"/>
-          <p:cNvSpPr/>
+          <p:cNvPr id="100010" name="TextBox 1"/>
+          <p:cNvSpPr txBox="1"/>
           <p:nvPr/>
         </p:nvSpPr>
         <p:spPr>
@@ -7313,7 +7315,7 @@
       </p:sp>
       <p:graphicFrame>
         <p:nvGraphicFramePr>
-          <p:cNvPr id="10011" name="shownegbubbles=false"/>
+          <p:cNvPr id="100011" name="shownegbubbles=false"/>
           <p:cNvGraphicFramePr/>
           <p:nvPr/>
         </p:nvGraphicFramePr>
@@ -7323,13 +7325,13 @@
         </p:xfrm>
         <a:graphic xmlns:a="http://schemas.openxmlformats.org/drawingml/2006/main">
           <a:graphicData uri="http://schemas.openxmlformats.org/drawingml/2006/chart">
-            <c:chart xmlns:r="http://schemas.openxmlformats.org/officeDocument/2006/relationships" xmlns:c="http://schemas.openxmlformats.org/drawingml/2006/chart" r:id="Rf3acd3ba5cca483a"/>
+            <c:chart xmlns:r="http://schemas.openxmlformats.org/officeDocument/2006/relationships" xmlns:c="http://schemas.openxmlformats.org/drawingml/2006/chart" r:id="Rabc9d279c54d47cd"/>
           </a:graphicData>
         </a:graphic>
       </p:graphicFrame>
       <p:graphicFrame>
         <p:nvGraphicFramePr>
-          <p:cNvPr id="10012" name="shownegbubbles=true"/>
+          <p:cNvPr id="100012" name="shownegbubbles=true"/>
           <p:cNvGraphicFramePr/>
           <p:nvPr/>
         </p:nvGraphicFramePr>
@@ -7339,13 +7341,13 @@
         </p:xfrm>
         <a:graphic xmlns:a="http://schemas.openxmlformats.org/drawingml/2006/main">
           <a:graphicData uri="http://schemas.openxmlformats.org/drawingml/2006/chart">
-            <c:chart xmlns:r="http://schemas.openxmlformats.org/officeDocument/2006/relationships" xmlns:c="http://schemas.openxmlformats.org/drawingml/2006/chart" r:id="R5c7ba46ab9a34ec0"/>
+            <c:chart xmlns:r="http://schemas.openxmlformats.org/officeDocument/2006/relationships" xmlns:c="http://schemas.openxmlformats.org/drawingml/2006/chart" r:id="Rff846eaff0a740a2"/>
           </a:graphicData>
         </a:graphic>
       </p:graphicFrame>
       <p:graphicFrame>
         <p:nvGraphicFramePr>
-          <p:cNvPr id="10013" name="false + 2 series"/>
+          <p:cNvPr id="100013" name="false + 2 series"/>
           <p:cNvGraphicFramePr/>
           <p:nvPr/>
         </p:nvGraphicFramePr>
@@ -7355,13 +7357,13 @@
         </p:xfrm>
         <a:graphic xmlns:a="http://schemas.openxmlformats.org/drawingml/2006/main">
           <a:graphicData uri="http://schemas.openxmlformats.org/drawingml/2006/chart">
-            <c:chart xmlns:r="http://schemas.openxmlformats.org/officeDocument/2006/relationships" xmlns:c="http://schemas.openxmlformats.org/drawingml/2006/chart" r:id="R9acf3ce0f7e340ac"/>
+            <c:chart xmlns:r="http://schemas.openxmlformats.org/officeDocument/2006/relationships" xmlns:c="http://schemas.openxmlformats.org/drawingml/2006/chart" r:id="R8576d1449e9645c8"/>
           </a:graphicData>
         </a:graphic>
       </p:graphicFrame>
       <p:graphicFrame>
         <p:nvGraphicFramePr>
-          <p:cNvPr id="10014" name="true + 2 series"/>
+          <p:cNvPr id="100014" name="true + 2 series"/>
           <p:cNvGraphicFramePr/>
           <p:nvPr/>
         </p:nvGraphicFramePr>
@@ -7371,7 +7373,7 @@
         </p:xfrm>
         <a:graphic xmlns:a="http://schemas.openxmlformats.org/drawingml/2006/main">
           <a:graphicData uri="http://schemas.openxmlformats.org/drawingml/2006/chart">
-            <c:chart xmlns:r="http://schemas.openxmlformats.org/officeDocument/2006/relationships" xmlns:c="http://schemas.openxmlformats.org/drawingml/2006/chart" r:id="R5e191c01aa894d1a"/>
+            <c:chart xmlns:r="http://schemas.openxmlformats.org/officeDocument/2006/relationships" xmlns:c="http://schemas.openxmlformats.org/drawingml/2006/chart" r:id="R975be47135874366"/>
           </a:graphicData>
         </a:graphic>
       </p:graphicFrame>
@@ -7392,8 +7394,8 @@
       <p:grpSpPr/>
       <p:sp>
         <p:nvSpPr>
-          <p:cNvPr id="10015" name="TextBox 1"/>
-          <p:cNvSpPr/>
+          <p:cNvPr id="100015" name="TextBox 1"/>
+          <p:cNvSpPr txBox="1"/>
           <p:nvPr/>
         </p:nvSpPr>
         <p:spPr>
@@ -7420,7 +7422,7 @@
       </p:sp>
       <p:graphicFrame>
         <p:nvGraphicFramePr>
-          <p:cNvPr id="10016" name="Styled title"/>
+          <p:cNvPr id="100016" name="Styled title"/>
           <p:cNvGraphicFramePr/>
           <p:nvPr/>
         </p:nvGraphicFramePr>
@@ -7430,13 +7432,13 @@
         </p:xfrm>
         <a:graphic xmlns:a="http://schemas.openxmlformats.org/drawingml/2006/main">
           <a:graphicData uri="http://schemas.openxmlformats.org/drawingml/2006/chart">
-            <c:chart xmlns:r="http://schemas.openxmlformats.org/officeDocument/2006/relationships" xmlns:c="http://schemas.openxmlformats.org/drawingml/2006/chart" r:id="R8714338e0d5e4e20"/>
+            <c:chart xmlns:r="http://schemas.openxmlformats.org/officeDocument/2006/relationships" xmlns:c="http://schemas.openxmlformats.org/drawingml/2006/chart" r:id="R110ef07d45ea4569"/>
           </a:graphicData>
         </a:graphic>
       </p:graphicFrame>
       <p:graphicFrame>
         <p:nvGraphicFramePr>
-          <p:cNvPr id="10017" name="legend=top + legendFont"/>
+          <p:cNvPr id="100017" name="legend=top + legendFont"/>
           <p:cNvGraphicFramePr/>
           <p:nvPr/>
         </p:nvGraphicFramePr>
@@ -7446,13 +7448,13 @@
         </p:xfrm>
         <a:graphic xmlns:a="http://schemas.openxmlformats.org/drawingml/2006/main">
           <a:graphicData uri="http://schemas.openxmlformats.org/drawingml/2006/chart">
-            <c:chart xmlns:r="http://schemas.openxmlformats.org/officeDocument/2006/relationships" xmlns:c="http://schemas.openxmlformats.org/drawingml/2006/chart" r:id="Re60ee7e67c7f4563"/>
+            <c:chart xmlns:r="http://schemas.openxmlformats.org/officeDocument/2006/relationships" xmlns:c="http://schemas.openxmlformats.org/drawingml/2006/chart" r:id="R00b0c483e4834533"/>
           </a:graphicData>
         </a:graphic>
       </p:graphicFrame>
       <p:graphicFrame>
         <p:nvGraphicFramePr>
-          <p:cNvPr id="10018" name="legend.overlay=true"/>
+          <p:cNvPr id="100018" name="legend.overlay=true"/>
           <p:cNvGraphicFramePr/>
           <p:nvPr/>
         </p:nvGraphicFramePr>
@@ -7462,13 +7464,13 @@
         </p:xfrm>
         <a:graphic xmlns:a="http://schemas.openxmlformats.org/drawingml/2006/main">
           <a:graphicData uri="http://schemas.openxmlformats.org/drawingml/2006/chart">
-            <c:chart xmlns:r="http://schemas.openxmlformats.org/officeDocument/2006/relationships" xmlns:c="http://schemas.openxmlformats.org/drawingml/2006/chart" r:id="R82eb6ed22226455d"/>
+            <c:chart xmlns:r="http://schemas.openxmlformats.org/officeDocument/2006/relationships" xmlns:c="http://schemas.openxmlformats.org/drawingml/2006/chart" r:id="R29b92134a7a54ba2"/>
           </a:graphicData>
         </a:graphic>
       </p:graphicFrame>
       <p:graphicFrame>
         <p:nvGraphicFramePr>
-          <p:cNvPr id="10019" name="Chart 4"/>
+          <p:cNvPr id="100019" name="Chart 4"/>
           <p:cNvGraphicFramePr/>
           <p:nvPr/>
         </p:nvGraphicFramePr>
@@ -7478,7 +7480,7 @@
         </p:xfrm>
         <a:graphic xmlns:a="http://schemas.openxmlformats.org/drawingml/2006/main">
           <a:graphicData uri="http://schemas.openxmlformats.org/drawingml/2006/chart">
-            <c:chart xmlns:r="http://schemas.openxmlformats.org/officeDocument/2006/relationships" xmlns:c="http://schemas.openxmlformats.org/drawingml/2006/chart" r:id="Rccda755b35d744e8"/>
+            <c:chart xmlns:r="http://schemas.openxmlformats.org/officeDocument/2006/relationships" xmlns:c="http://schemas.openxmlformats.org/drawingml/2006/chart" r:id="R16cf8e090910479a"/>
           </a:graphicData>
         </a:graphic>
       </p:graphicFrame>
@@ -7499,8 +7501,8 @@
       <p:grpSpPr/>
       <p:sp>
         <p:nvSpPr>
-          <p:cNvPr id="10020" name="TextBox 1"/>
-          <p:cNvSpPr/>
+          <p:cNvPr id="100020" name="TextBox 1"/>
+          <p:cNvSpPr txBox="1"/>
           <p:nvPr/>
         </p:nvSpPr>
         <p:spPr>
@@ -7527,7 +7529,7 @@
       </p:sp>
       <p:graphicFrame>
         <p:nvGraphicFramePr>
-          <p:cNvPr id="10021" name="value"/>
+          <p:cNvPr id="100021" name="value"/>
           <p:cNvGraphicFramePr/>
           <p:nvPr/>
         </p:nvGraphicFramePr>
@@ -7537,13 +7539,13 @@
         </p:xfrm>
         <a:graphic xmlns:a="http://schemas.openxmlformats.org/drawingml/2006/main">
           <a:graphicData uri="http://schemas.openxmlformats.org/drawingml/2006/chart">
-            <c:chart xmlns:r="http://schemas.openxmlformats.org/officeDocument/2006/relationships" xmlns:c="http://schemas.openxmlformats.org/drawingml/2006/chart" r:id="Ra73e75d7ec7c4b6a"/>
+            <c:chart xmlns:r="http://schemas.openxmlformats.org/officeDocument/2006/relationships" xmlns:c="http://schemas.openxmlformats.org/drawingml/2006/chart" r:id="R24e0f71f0ffe4645"/>
           </a:graphicData>
         </a:graphic>
       </p:graphicFrame>
       <p:graphicFrame>
         <p:nvGraphicFramePr>
-          <p:cNvPr id="10022" name="value,series"/>
+          <p:cNvPr id="100022" name="value,series"/>
           <p:cNvGraphicFramePr/>
           <p:nvPr/>
         </p:nvGraphicFramePr>
@@ -7553,13 +7555,13 @@
         </p:xfrm>
         <a:graphic xmlns:a="http://schemas.openxmlformats.org/drawingml/2006/main">
           <a:graphicData uri="http://schemas.openxmlformats.org/drawingml/2006/chart">
-            <c:chart xmlns:r="http://schemas.openxmlformats.org/officeDocument/2006/relationships" xmlns:c="http://schemas.openxmlformats.org/drawingml/2006/chart" r:id="R585f921a9f624825"/>
+            <c:chart xmlns:r="http://schemas.openxmlformats.org/officeDocument/2006/relationships" xmlns:c="http://schemas.openxmlformats.org/drawingml/2006/chart" r:id="R2f4cf86242ee4103"/>
           </a:graphicData>
         </a:graphic>
       </p:graphicFrame>
       <p:graphicFrame>
         <p:nvGraphicFramePr>
-          <p:cNvPr id="10023" name="labelPos=top"/>
+          <p:cNvPr id="100023" name="labelPos=top"/>
           <p:cNvGraphicFramePr/>
           <p:nvPr/>
         </p:nvGraphicFramePr>
@@ -7569,13 +7571,13 @@
         </p:xfrm>
         <a:graphic xmlns:a="http://schemas.openxmlformats.org/drawingml/2006/main">
           <a:graphicData uri="http://schemas.openxmlformats.org/drawingml/2006/chart">
-            <c:chart xmlns:r="http://schemas.openxmlformats.org/officeDocument/2006/relationships" xmlns:c="http://schemas.openxmlformats.org/drawingml/2006/chart" r:id="R464018b6f3934352"/>
+            <c:chart xmlns:r="http://schemas.openxmlformats.org/officeDocument/2006/relationships" xmlns:c="http://schemas.openxmlformats.org/drawingml/2006/chart" r:id="Re02b7f664b3b4fd7"/>
           </a:graphicData>
         </a:graphic>
       </p:graphicFrame>
       <p:graphicFrame>
         <p:nvGraphicFramePr>
-          <p:cNvPr id="10024" name="dataLabels=none"/>
+          <p:cNvPr id="100024" name="dataLabels=none"/>
           <p:cNvGraphicFramePr/>
           <p:nvPr/>
         </p:nvGraphicFramePr>
@@ -7585,7 +7587,7 @@
         </p:xfrm>
         <a:graphic xmlns:a="http://schemas.openxmlformats.org/drawingml/2006/main">
           <a:graphicData uri="http://schemas.openxmlformats.org/drawingml/2006/chart">
-            <c:chart xmlns:r="http://schemas.openxmlformats.org/officeDocument/2006/relationships" xmlns:c="http://schemas.openxmlformats.org/drawingml/2006/chart" r:id="Rcbf466cd0ef24014"/>
+            <c:chart xmlns:r="http://schemas.openxmlformats.org/officeDocument/2006/relationships" xmlns:c="http://schemas.openxmlformats.org/drawingml/2006/chart" r:id="R22b9d23f651b45f3"/>
           </a:graphicData>
         </a:graphic>
       </p:graphicFrame>
@@ -7606,8 +7608,8 @@
       <p:grpSpPr/>
       <p:sp>
         <p:nvSpPr>
-          <p:cNvPr id="10025" name="TextBox 1"/>
-          <p:cNvSpPr/>
+          <p:cNvPr id="100025" name="TextBox 1"/>
+          <p:cNvSpPr txBox="1"/>
           <p:nvPr/>
         </p:nvSpPr>
         <p:spPr>
@@ -7634,7 +7636,7 @@
       </p:sp>
       <p:graphicFrame>
         <p:nvGraphicFramePr>
-          <p:cNvPr id="10026" name="min/max + titles"/>
+          <p:cNvPr id="100026" name="min/max + titles"/>
           <p:cNvGraphicFramePr/>
           <p:nvPr/>
         </p:nvGraphicFramePr>
@@ -7644,13 +7646,13 @@
         </p:xfrm>
         <a:graphic xmlns:a="http://schemas.openxmlformats.org/drawingml/2006/main">
           <a:graphicData uri="http://schemas.openxmlformats.org/drawingml/2006/chart">
-            <c:chart xmlns:r="http://schemas.openxmlformats.org/officeDocument/2006/relationships" xmlns:c="http://schemas.openxmlformats.org/drawingml/2006/chart" r:id="R5cd31cecdeab4ea6"/>
+            <c:chart xmlns:r="http://schemas.openxmlformats.org/officeDocument/2006/relationships" xmlns:c="http://schemas.openxmlformats.org/drawingml/2006/chart" r:id="R0097e038ce154288"/>
           </a:graphicData>
         </a:graphic>
       </p:graphicFrame>
       <p:graphicFrame>
         <p:nvGraphicFramePr>
-          <p:cNvPr id="10027" name="gridlines + minorGridlines"/>
+          <p:cNvPr id="100027" name="gridlines + minorGridlines"/>
           <p:cNvGraphicFramePr/>
           <p:nvPr/>
         </p:nvGraphicFramePr>
@@ -7660,13 +7662,13 @@
         </p:xfrm>
         <a:graphic xmlns:a="http://schemas.openxmlformats.org/drawingml/2006/main">
           <a:graphicData uri="http://schemas.openxmlformats.org/drawingml/2006/chart">
-            <c:chart xmlns:r="http://schemas.openxmlformats.org/officeDocument/2006/relationships" xmlns:c="http://schemas.openxmlformats.org/drawingml/2006/chart" r:id="R466b83b470fe463d"/>
+            <c:chart xmlns:r="http://schemas.openxmlformats.org/officeDocument/2006/relationships" xmlns:c="http://schemas.openxmlformats.org/drawingml/2006/chart" r:id="Rb21b3f636a6d4a22"/>
           </a:graphicData>
         </a:graphic>
       </p:graphicFrame>
       <p:graphicFrame>
         <p:nvGraphicFramePr>
-          <p:cNvPr id="10028" name="labelrotation=-30"/>
+          <p:cNvPr id="100028" name="labelrotation=-30"/>
           <p:cNvGraphicFramePr/>
           <p:nvPr/>
         </p:nvGraphicFramePr>
@@ -7676,13 +7678,13 @@
         </p:xfrm>
         <a:graphic xmlns:a="http://schemas.openxmlformats.org/drawingml/2006/main">
           <a:graphicData uri="http://schemas.openxmlformats.org/drawingml/2006/chart">
-            <c:chart xmlns:r="http://schemas.openxmlformats.org/officeDocument/2006/relationships" xmlns:c="http://schemas.openxmlformats.org/drawingml/2006/chart" r:id="R8aa495050c954d2a"/>
+            <c:chart xmlns:r="http://schemas.openxmlformats.org/officeDocument/2006/relationships" xmlns:c="http://schemas.openxmlformats.org/drawingml/2006/chart" r:id="Rf28546b28ea2418f"/>
           </a:graphicData>
         </a:graphic>
       </p:graphicFrame>
       <p:graphicFrame>
         <p:nvGraphicFramePr>
-          <p:cNvPr id="10029" name="dispunits=hundreds"/>
+          <p:cNvPr id="100029" name="dispunits=hundreds"/>
           <p:cNvGraphicFramePr/>
           <p:nvPr/>
         </p:nvGraphicFramePr>
@@ -7692,7 +7694,7 @@
         </p:xfrm>
         <a:graphic xmlns:a="http://schemas.openxmlformats.org/drawingml/2006/main">
           <a:graphicData uri="http://schemas.openxmlformats.org/drawingml/2006/chart">
-            <c:chart xmlns:r="http://schemas.openxmlformats.org/officeDocument/2006/relationships" xmlns:c="http://schemas.openxmlformats.org/drawingml/2006/chart" r:id="R566f56b4cb424d3d"/>
+            <c:chart xmlns:r="http://schemas.openxmlformats.org/officeDocument/2006/relationships" xmlns:c="http://schemas.openxmlformats.org/drawingml/2006/chart" r:id="R36ff31f19d4e467a"/>
           </a:graphicData>
         </a:graphic>
       </p:graphicFrame>
@@ -7713,8 +7715,8 @@
       <p:grpSpPr/>
       <p:sp>
         <p:nvSpPr>
-          <p:cNvPr id="10030" name="TextBox 1"/>
-          <p:cNvSpPr/>
+          <p:cNvPr id="100030" name="TextBox 1"/>
+          <p:cNvSpPr txBox="1"/>
           <p:nvPr/>
         </p:nvSpPr>
         <p:spPr>
@@ -7741,7 +7743,7 @@
       </p:sp>
       <p:graphicFrame>
         <p:nvGraphicFramePr>
-          <p:cNvPr id="10031" name="colors + seriesoutline"/>
+          <p:cNvPr id="100031" name="colors + seriesoutline"/>
           <p:cNvGraphicFramePr/>
           <p:nvPr/>
         </p:nvGraphicFramePr>
@@ -7751,13 +7753,13 @@
         </p:xfrm>
         <a:graphic xmlns:a="http://schemas.openxmlformats.org/drawingml/2006/main">
           <a:graphicData uri="http://schemas.openxmlformats.org/drawingml/2006/chart">
-            <c:chart xmlns:r="http://schemas.openxmlformats.org/officeDocument/2006/relationships" xmlns:c="http://schemas.openxmlformats.org/drawingml/2006/chart" r:id="R714a8acc37034724"/>
+            <c:chart xmlns:r="http://schemas.openxmlformats.org/officeDocument/2006/relationships" xmlns:c="http://schemas.openxmlformats.org/drawingml/2006/chart" r:id="R596beaa178704018"/>
           </a:graphicData>
         </a:graphic>
       </p:graphicFrame>
       <p:graphicFrame>
         <p:nvGraphicFramePr>
-          <p:cNvPr id="10032" name="gradient + seriesshadow"/>
+          <p:cNvPr id="100032" name="gradient + seriesshadow"/>
           <p:cNvGraphicFramePr/>
           <p:nvPr/>
         </p:nvGraphicFramePr>
@@ -7767,13 +7769,13 @@
         </p:xfrm>
         <a:graphic xmlns:a="http://schemas.openxmlformats.org/drawingml/2006/main">
           <a:graphicData uri="http://schemas.openxmlformats.org/drawingml/2006/chart">
-            <c:chart xmlns:r="http://schemas.openxmlformats.org/officeDocument/2006/relationships" xmlns:c="http://schemas.openxmlformats.org/drawingml/2006/chart" r:id="Rca3fbde5834b4971"/>
+            <c:chart xmlns:r="http://schemas.openxmlformats.org/officeDocument/2006/relationships" xmlns:c="http://schemas.openxmlformats.org/drawingml/2006/chart" r:id="Rf9fd827e9a82457e"/>
           </a:graphicData>
         </a:graphic>
       </p:graphicFrame>
       <p:graphicFrame>
         <p:nvGraphicFramePr>
-          <p:cNvPr id="10033" name="transparency=30"/>
+          <p:cNvPr id="100033" name="transparency=30"/>
           <p:cNvGraphicFramePr/>
           <p:nvPr/>
         </p:nvGraphicFramePr>
@@ -7783,13 +7785,13 @@
         </p:xfrm>
         <a:graphic xmlns:a="http://schemas.openxmlformats.org/drawingml/2006/main">
           <a:graphicData uri="http://schemas.openxmlformats.org/drawingml/2006/chart">
-            <c:chart xmlns:r="http://schemas.openxmlformats.org/officeDocument/2006/relationships" xmlns:c="http://schemas.openxmlformats.org/drawingml/2006/chart" r:id="R73d11d2f4e624354"/>
+            <c:chart xmlns:r="http://schemas.openxmlformats.org/officeDocument/2006/relationships" xmlns:c="http://schemas.openxmlformats.org/drawingml/2006/chart" r:id="R288e0dd17c7149a3"/>
           </a:graphicData>
         </a:graphic>
       </p:graphicFrame>
       <p:graphicFrame>
         <p:nvGraphicFramePr>
-          <p:cNvPr id="10034" name="per-series gradients"/>
+          <p:cNvPr id="100034" name="per-series gradients"/>
           <p:cNvGraphicFramePr/>
           <p:nvPr/>
         </p:nvGraphicFramePr>
@@ -7799,7 +7801,7 @@
         </p:xfrm>
         <a:graphic xmlns:a="http://schemas.openxmlformats.org/drawingml/2006/main">
           <a:graphicData uri="http://schemas.openxmlformats.org/drawingml/2006/chart">
-            <c:chart xmlns:r="http://schemas.openxmlformats.org/officeDocument/2006/relationships" xmlns:c="http://schemas.openxmlformats.org/drawingml/2006/chart" r:id="R4236e3e7121a4b44"/>
+            <c:chart xmlns:r="http://schemas.openxmlformats.org/officeDocument/2006/relationships" xmlns:c="http://schemas.openxmlformats.org/drawingml/2006/chart" r:id="R87fc7c3db1014b63"/>
           </a:graphicData>
         </a:graphic>
       </p:graphicFrame>
@@ -7820,8 +7822,8 @@
       <p:grpSpPr/>
       <p:sp>
         <p:nvSpPr>
-          <p:cNvPr id="10035" name="TextBox 1"/>
-          <p:cNvSpPr/>
+          <p:cNvPr id="100035" name="TextBox 1"/>
+          <p:cNvSpPr txBox="1"/>
           <p:nvPr/>
         </p:nvSpPr>
         <p:spPr>
@@ -7848,7 +7850,7 @@
       </p:sp>
       <p:graphicFrame>
         <p:nvGraphicFramePr>
-          <p:cNvPr id="10036" name="preset=minimal"/>
+          <p:cNvPr id="100036" name="preset=minimal"/>
           <p:cNvGraphicFramePr/>
           <p:nvPr/>
         </p:nvGraphicFramePr>
@@ -7858,13 +7860,13 @@
         </p:xfrm>
         <a:graphic xmlns:a="http://schemas.openxmlformats.org/drawingml/2006/main">
           <a:graphicData uri="http://schemas.openxmlformats.org/drawingml/2006/chart">
-            <c:chart xmlns:r="http://schemas.openxmlformats.org/officeDocument/2006/relationships" xmlns:c="http://schemas.openxmlformats.org/drawingml/2006/chart" r:id="R6c01c6115fa34fb8"/>
+            <c:chart xmlns:r="http://schemas.openxmlformats.org/officeDocument/2006/relationships" xmlns:c="http://schemas.openxmlformats.org/drawingml/2006/chart" r:id="R6262839ed1324e29"/>
           </a:graphicData>
         </a:graphic>
       </p:graphicFrame>
       <p:graphicFrame>
         <p:nvGraphicFramePr>
-          <p:cNvPr id="10037" name="preset=dark"/>
+          <p:cNvPr id="100037" name="preset=dark"/>
           <p:cNvGraphicFramePr/>
           <p:nvPr/>
         </p:nvGraphicFramePr>
@@ -7874,13 +7876,13 @@
         </p:xfrm>
         <a:graphic xmlns:a="http://schemas.openxmlformats.org/drawingml/2006/main">
           <a:graphicData uri="http://schemas.openxmlformats.org/drawingml/2006/chart">
-            <c:chart xmlns:r="http://schemas.openxmlformats.org/officeDocument/2006/relationships" xmlns:c="http://schemas.openxmlformats.org/drawingml/2006/chart" r:id="Rf725b5bfcbe94cb7"/>
+            <c:chart xmlns:r="http://schemas.openxmlformats.org/officeDocument/2006/relationships" xmlns:c="http://schemas.openxmlformats.org/drawingml/2006/chart" r:id="Rc1ae2d94a34b422d"/>
           </a:graphicData>
         </a:graphic>
       </p:graphicFrame>
       <p:graphicFrame>
         <p:nvGraphicFramePr>
-          <p:cNvPr id="10038" name="preset=corporate"/>
+          <p:cNvPr id="100038" name="preset=corporate"/>
           <p:cNvGraphicFramePr/>
           <p:nvPr/>
         </p:nvGraphicFramePr>
@@ -7890,13 +7892,13 @@
         </p:xfrm>
         <a:graphic xmlns:a="http://schemas.openxmlformats.org/drawingml/2006/main">
           <a:graphicData uri="http://schemas.openxmlformats.org/drawingml/2006/chart">
-            <c:chart xmlns:r="http://schemas.openxmlformats.org/officeDocument/2006/relationships" xmlns:c="http://schemas.openxmlformats.org/drawingml/2006/chart" r:id="R40b34e9a4b9843e4"/>
+            <c:chart xmlns:r="http://schemas.openxmlformats.org/officeDocument/2006/relationships" xmlns:c="http://schemas.openxmlformats.org/drawingml/2006/chart" r:id="R4d7b0bc136954c76"/>
           </a:graphicData>
         </a:graphic>
       </p:graphicFrame>
       <p:graphicFrame>
         <p:nvGraphicFramePr>
-          <p:cNvPr id="10039" name="chart-series Set name+color"/>
+          <p:cNvPr id="100039" name="chart-series Set name+color"/>
           <p:cNvGraphicFramePr/>
           <p:nvPr/>
         </p:nvGraphicFramePr>
@@ -7906,7 +7908,7 @@
         </p:xfrm>
         <a:graphic xmlns:a="http://schemas.openxmlformats.org/drawingml/2006/main">
           <a:graphicData uri="http://schemas.openxmlformats.org/drawingml/2006/chart">
-            <c:chart xmlns:r="http://schemas.openxmlformats.org/officeDocument/2006/relationships" xmlns:c="http://schemas.openxmlformats.org/drawingml/2006/chart" r:id="R6575aa7160034d55"/>
+            <c:chart xmlns:r="http://schemas.openxmlformats.org/officeDocument/2006/relationships" xmlns:c="http://schemas.openxmlformats.org/drawingml/2006/chart" r:id="Rc4e01321c6e540fe"/>
           </a:graphicData>
         </a:graphic>
       </p:graphicFrame>
